--- a/Мессенджер.pptx
+++ b/Мессенджер.pptx
@@ -106,6 +106,11 @@
       </a:defRPr>
     </a:lvl9pPr>
   </p:defaultTextStyle>
+  <p:extLst>
+    <p:ext uri="{EFAFB233-063F-42B5-8137-9DF3F51BA10A}">
+      <p15:sldGuideLst xmlns:p15="http://schemas.microsoft.com/office/powerpoint/2012/main"/>
+    </p:ext>
+  </p:extLst>
 </p:presentation>
 </file>
 
@@ -3389,8 +3394,8 @@
         </p:nvSpPr>
         <p:spPr>
           <a:xfrm>
-            <a:off x="1466850" y="1028700"/>
-            <a:ext cx="3733800" cy="2578100"/>
+            <a:off x="1466850" y="787400"/>
+            <a:ext cx="4508500" cy="3460750"/>
           </a:xfrm>
           <a:prstGeom prst="wedgeRoundRectCallout">
             <a:avLst/>
@@ -3445,16 +3450,20 @@
         </p:nvSpPr>
         <p:spPr>
           <a:xfrm>
-            <a:off x="1911350" y="2387600"/>
-            <a:ext cx="2781300" cy="423862"/>
+            <a:off x="1811888" y="2835273"/>
+            <a:ext cx="3818422" cy="663576"/>
           </a:xfrm>
         </p:spPr>
         <p:txBody>
-          <a:bodyPr/>
-          <a:lstStyle/>
-          <a:p>
-            <a:r>
-              <a:rPr lang="ru-RU" dirty="0"/>
+          <a:bodyPr>
+            <a:noAutofit/>
+          </a:bodyPr>
+          <a:lstStyle/>
+          <a:p>
+            <a:r>
+              <a:rPr lang="ru-RU" dirty="0">
+                <a:latin typeface="Bahnschrift Condensed" panose="020B0502040204020203" pitchFamily="34" charset="0"/>
+              </a:rPr>
               <a:t>Гизатулина Виталия</a:t>
             </a:r>
           </a:p>
@@ -3478,21 +3487,220 @@
         </p:nvSpPr>
         <p:spPr>
           <a:xfrm>
-            <a:off x="1822450" y="1682750"/>
-            <a:ext cx="3162300" cy="787400"/>
+            <a:off x="1811888" y="1089321"/>
+            <a:ext cx="3818423" cy="1056978"/>
           </a:xfrm>
         </p:spPr>
         <p:txBody>
           <a:bodyPr>
-            <a:normAutofit/>
+            <a:normAutofit fontScale="90000"/>
           </a:bodyPr>
           <a:lstStyle/>
           <a:p>
             <a:r>
-              <a:rPr lang="ru-RU" sz="4400" dirty="0">
-                <a:latin typeface="Bahnschrift SemiBold SemiConden" panose="020B0502040204020203" pitchFamily="34" charset="0"/>
+              <a:rPr lang="en-US" b="1" dirty="0"/>
+              <a:t>VITALiGRAM</a:t>
+            </a:r>
+          </a:p>
+        </p:txBody>
+      </p:sp>
+      <p:sp>
+        <p:nvSpPr>
+          <p:cNvPr id="4" name="Подзаголовок 2">
+            <a:extLst>
+              <a:ext uri="{FF2B5EF4-FFF2-40B4-BE49-F238E27FC236}">
+                <a16:creationId xmlns:a16="http://schemas.microsoft.com/office/drawing/2014/main" id="{87F342D4-5A7C-C0EC-4AEB-431B8D709204}"/>
+              </a:ext>
+            </a:extLst>
+          </p:cNvPr>
+          <p:cNvSpPr txBox="1">
+            <a:spLocks/>
+          </p:cNvSpPr>
+          <p:nvPr/>
+        </p:nvSpPr>
+        <p:spPr>
+          <a:xfrm>
+            <a:off x="1811888" y="2365373"/>
+            <a:ext cx="3818422" cy="663576"/>
+          </a:xfrm>
+          <a:prstGeom prst="rect">
+            <a:avLst/>
+          </a:prstGeom>
+        </p:spPr>
+        <p:txBody>
+          <a:bodyPr vert="horz" lIns="91440" tIns="45720" rIns="91440" bIns="45720" rtlCol="0">
+            <a:noAutofit/>
+          </a:bodyPr>
+          <a:lstStyle>
+            <a:lvl1pPr marL="0" indent="0" algn="ctr" defTabSz="914400" rtl="0" eaLnBrk="1" latinLnBrk="0" hangingPunct="1">
+              <a:lnSpc>
+                <a:spcPct val="90000"/>
+              </a:lnSpc>
+              <a:spcBef>
+                <a:spcPts val="1000"/>
+              </a:spcBef>
+              <a:buFont typeface="Arial" panose="020B0604020202020204" pitchFamily="34" charset="0"/>
+              <a:buNone/>
+              <a:defRPr sz="2400" kern="1200">
+                <a:solidFill>
+                  <a:schemeClr val="tx1"/>
+                </a:solidFill>
+                <a:latin typeface="+mn-lt"/>
+                <a:ea typeface="+mn-ea"/>
+                <a:cs typeface="+mn-cs"/>
+              </a:defRPr>
+            </a:lvl1pPr>
+            <a:lvl2pPr marL="457200" indent="0" algn="ctr" defTabSz="914400" rtl="0" eaLnBrk="1" latinLnBrk="0" hangingPunct="1">
+              <a:lnSpc>
+                <a:spcPct val="90000"/>
+              </a:lnSpc>
+              <a:spcBef>
+                <a:spcPts val="500"/>
+              </a:spcBef>
+              <a:buFont typeface="Arial" panose="020B0604020202020204" pitchFamily="34" charset="0"/>
+              <a:buNone/>
+              <a:defRPr sz="2000" kern="1200">
+                <a:solidFill>
+                  <a:schemeClr val="tx1"/>
+                </a:solidFill>
+                <a:latin typeface="+mn-lt"/>
+                <a:ea typeface="+mn-ea"/>
+                <a:cs typeface="+mn-cs"/>
+              </a:defRPr>
+            </a:lvl2pPr>
+            <a:lvl3pPr marL="914400" indent="0" algn="ctr" defTabSz="914400" rtl="0" eaLnBrk="1" latinLnBrk="0" hangingPunct="1">
+              <a:lnSpc>
+                <a:spcPct val="90000"/>
+              </a:lnSpc>
+              <a:spcBef>
+                <a:spcPts val="500"/>
+              </a:spcBef>
+              <a:buFont typeface="Arial" panose="020B0604020202020204" pitchFamily="34" charset="0"/>
+              <a:buNone/>
+              <a:defRPr sz="1800" kern="1200">
+                <a:solidFill>
+                  <a:schemeClr val="tx1"/>
+                </a:solidFill>
+                <a:latin typeface="+mn-lt"/>
+                <a:ea typeface="+mn-ea"/>
+                <a:cs typeface="+mn-cs"/>
+              </a:defRPr>
+            </a:lvl3pPr>
+            <a:lvl4pPr marL="1371600" indent="0" algn="ctr" defTabSz="914400" rtl="0" eaLnBrk="1" latinLnBrk="0" hangingPunct="1">
+              <a:lnSpc>
+                <a:spcPct val="90000"/>
+              </a:lnSpc>
+              <a:spcBef>
+                <a:spcPts val="500"/>
+              </a:spcBef>
+              <a:buFont typeface="Arial" panose="020B0604020202020204" pitchFamily="34" charset="0"/>
+              <a:buNone/>
+              <a:defRPr sz="1600" kern="1200">
+                <a:solidFill>
+                  <a:schemeClr val="tx1"/>
+                </a:solidFill>
+                <a:latin typeface="+mn-lt"/>
+                <a:ea typeface="+mn-ea"/>
+                <a:cs typeface="+mn-cs"/>
+              </a:defRPr>
+            </a:lvl4pPr>
+            <a:lvl5pPr marL="1828800" indent="0" algn="ctr" defTabSz="914400" rtl="0" eaLnBrk="1" latinLnBrk="0" hangingPunct="1">
+              <a:lnSpc>
+                <a:spcPct val="90000"/>
+              </a:lnSpc>
+              <a:spcBef>
+                <a:spcPts val="500"/>
+              </a:spcBef>
+              <a:buFont typeface="Arial" panose="020B0604020202020204" pitchFamily="34" charset="0"/>
+              <a:buNone/>
+              <a:defRPr sz="1600" kern="1200">
+                <a:solidFill>
+                  <a:schemeClr val="tx1"/>
+                </a:solidFill>
+                <a:latin typeface="+mn-lt"/>
+                <a:ea typeface="+mn-ea"/>
+                <a:cs typeface="+mn-cs"/>
+              </a:defRPr>
+            </a:lvl5pPr>
+            <a:lvl6pPr marL="2286000" indent="0" algn="ctr" defTabSz="914400" rtl="0" eaLnBrk="1" latinLnBrk="0" hangingPunct="1">
+              <a:lnSpc>
+                <a:spcPct val="90000"/>
+              </a:lnSpc>
+              <a:spcBef>
+                <a:spcPts val="500"/>
+              </a:spcBef>
+              <a:buFont typeface="Arial" panose="020B0604020202020204" pitchFamily="34" charset="0"/>
+              <a:buNone/>
+              <a:defRPr sz="1600" kern="1200">
+                <a:solidFill>
+                  <a:schemeClr val="tx1"/>
+                </a:solidFill>
+                <a:latin typeface="+mn-lt"/>
+                <a:ea typeface="+mn-ea"/>
+                <a:cs typeface="+mn-cs"/>
+              </a:defRPr>
+            </a:lvl6pPr>
+            <a:lvl7pPr marL="2743200" indent="0" algn="ctr" defTabSz="914400" rtl="0" eaLnBrk="1" latinLnBrk="0" hangingPunct="1">
+              <a:lnSpc>
+                <a:spcPct val="90000"/>
+              </a:lnSpc>
+              <a:spcBef>
+                <a:spcPts val="500"/>
+              </a:spcBef>
+              <a:buFont typeface="Arial" panose="020B0604020202020204" pitchFamily="34" charset="0"/>
+              <a:buNone/>
+              <a:defRPr sz="1600" kern="1200">
+                <a:solidFill>
+                  <a:schemeClr val="tx1"/>
+                </a:solidFill>
+                <a:latin typeface="+mn-lt"/>
+                <a:ea typeface="+mn-ea"/>
+                <a:cs typeface="+mn-cs"/>
+              </a:defRPr>
+            </a:lvl7pPr>
+            <a:lvl8pPr marL="3200400" indent="0" algn="ctr" defTabSz="914400" rtl="0" eaLnBrk="1" latinLnBrk="0" hangingPunct="1">
+              <a:lnSpc>
+                <a:spcPct val="90000"/>
+              </a:lnSpc>
+              <a:spcBef>
+                <a:spcPts val="500"/>
+              </a:spcBef>
+              <a:buFont typeface="Arial" panose="020B0604020202020204" pitchFamily="34" charset="0"/>
+              <a:buNone/>
+              <a:defRPr sz="1600" kern="1200">
+                <a:solidFill>
+                  <a:schemeClr val="tx1"/>
+                </a:solidFill>
+                <a:latin typeface="+mn-lt"/>
+                <a:ea typeface="+mn-ea"/>
+                <a:cs typeface="+mn-cs"/>
+              </a:defRPr>
+            </a:lvl8pPr>
+            <a:lvl9pPr marL="3657600" indent="0" algn="ctr" defTabSz="914400" rtl="0" eaLnBrk="1" latinLnBrk="0" hangingPunct="1">
+              <a:lnSpc>
+                <a:spcPct val="90000"/>
+              </a:lnSpc>
+              <a:spcBef>
+                <a:spcPts val="500"/>
+              </a:spcBef>
+              <a:buFont typeface="Arial" panose="020B0604020202020204" pitchFamily="34" charset="0"/>
+              <a:buNone/>
+              <a:defRPr sz="1600" kern="1200">
+                <a:solidFill>
+                  <a:schemeClr val="tx1"/>
+                </a:solidFill>
+                <a:latin typeface="+mn-lt"/>
+                <a:ea typeface="+mn-ea"/>
+                <a:cs typeface="+mn-cs"/>
+              </a:defRPr>
+            </a:lvl9pPr>
+          </a:lstStyle>
+          <a:p>
+            <a:r>
+              <a:rPr lang="ru-RU" sz="3200" dirty="0">
+                <a:latin typeface="Bahnschrift SemiBold Condensed" panose="020B0502040204020203" pitchFamily="34" charset="0"/>
               </a:rPr>
-              <a:t>Мессенджер </a:t>
+              <a:t>Мессенджер</a:t>
             </a:r>
           </a:p>
         </p:txBody>
@@ -3647,8 +3855,8 @@
         </p:nvSpPr>
         <p:spPr>
           <a:xfrm>
-            <a:off x="762000" y="1267619"/>
-            <a:ext cx="2781300" cy="423862"/>
+            <a:off x="222250" y="391319"/>
+            <a:ext cx="11747500" cy="423862"/>
           </a:xfrm>
           <a:prstGeom prst="rect">
             <a:avLst/>
@@ -3656,7 +3864,7 @@
         </p:spPr>
         <p:txBody>
           <a:bodyPr vert="horz" lIns="91440" tIns="45720" rIns="91440" bIns="45720" rtlCol="0">
-            <a:normAutofit fontScale="92500" lnSpcReduction="10000"/>
+            <a:noAutofit/>
           </a:bodyPr>
           <a:lstStyle>
             <a:lvl1pPr marL="228600" indent="-228600" algn="l" defTabSz="914400" rtl="0" eaLnBrk="1" latinLnBrk="0" hangingPunct="1">
@@ -3827,8 +4035,234 @@
               <a:buNone/>
             </a:pPr>
             <a:r>
-              <a:rPr lang="ru-RU" dirty="0"/>
-              <a:t>а</a:t>
+              <a:rPr lang="ru-RU" sz="3200" dirty="0"/>
+              <a:t>Мессенджер был написан на </a:t>
+            </a:r>
+            <a:r>
+              <a:rPr lang="en-US" sz="3200" dirty="0"/>
+              <a:t>Python </a:t>
+            </a:r>
+            <a:r>
+              <a:rPr lang="ru-RU" sz="3200" dirty="0"/>
+              <a:t>с использованием </a:t>
+            </a:r>
+            <a:r>
+              <a:rPr lang="en-US" sz="3200" dirty="0"/>
+              <a:t>FastAPI</a:t>
+            </a:r>
+            <a:r>
+              <a:rPr lang="ru-RU" sz="3200" dirty="0"/>
+              <a:t>.</a:t>
+            </a:r>
+          </a:p>
+        </p:txBody>
+      </p:sp>
+      <p:sp>
+        <p:nvSpPr>
+          <p:cNvPr id="2" name="Подзаголовок 2">
+            <a:extLst>
+              <a:ext uri="{FF2B5EF4-FFF2-40B4-BE49-F238E27FC236}">
+                <a16:creationId xmlns:a16="http://schemas.microsoft.com/office/drawing/2014/main" id="{1755222A-609C-AB12-B7BF-E25D198B494C}"/>
+              </a:ext>
+            </a:extLst>
+          </p:cNvPr>
+          <p:cNvSpPr txBox="1">
+            <a:spLocks/>
+          </p:cNvSpPr>
+          <p:nvPr/>
+        </p:nvSpPr>
+        <p:spPr>
+          <a:xfrm>
+            <a:off x="222250" y="815181"/>
+            <a:ext cx="11747500" cy="423862"/>
+          </a:xfrm>
+          <a:prstGeom prst="rect">
+            <a:avLst/>
+          </a:prstGeom>
+        </p:spPr>
+        <p:txBody>
+          <a:bodyPr vert="horz" lIns="91440" tIns="45720" rIns="91440" bIns="45720" rtlCol="0">
+            <a:noAutofit/>
+          </a:bodyPr>
+          <a:lstStyle>
+            <a:lvl1pPr marL="228600" indent="-228600" algn="l" defTabSz="914400" rtl="0" eaLnBrk="1" latinLnBrk="0" hangingPunct="1">
+              <a:lnSpc>
+                <a:spcPct val="90000"/>
+              </a:lnSpc>
+              <a:spcBef>
+                <a:spcPts val="1000"/>
+              </a:spcBef>
+              <a:buFont typeface="Arial" panose="020B0604020202020204" pitchFamily="34" charset="0"/>
+              <a:buChar char="•"/>
+              <a:defRPr sz="2800" kern="1200">
+                <a:solidFill>
+                  <a:schemeClr val="tx1"/>
+                </a:solidFill>
+                <a:latin typeface="+mn-lt"/>
+                <a:ea typeface="+mn-ea"/>
+                <a:cs typeface="+mn-cs"/>
+              </a:defRPr>
+            </a:lvl1pPr>
+            <a:lvl2pPr marL="685800" indent="-228600" algn="l" defTabSz="914400" rtl="0" eaLnBrk="1" latinLnBrk="0" hangingPunct="1">
+              <a:lnSpc>
+                <a:spcPct val="90000"/>
+              </a:lnSpc>
+              <a:spcBef>
+                <a:spcPts val="500"/>
+              </a:spcBef>
+              <a:buFont typeface="Arial" panose="020B0604020202020204" pitchFamily="34" charset="0"/>
+              <a:buChar char="•"/>
+              <a:defRPr sz="2400" kern="1200">
+                <a:solidFill>
+                  <a:schemeClr val="tx1"/>
+                </a:solidFill>
+                <a:latin typeface="+mn-lt"/>
+                <a:ea typeface="+mn-ea"/>
+                <a:cs typeface="+mn-cs"/>
+              </a:defRPr>
+            </a:lvl2pPr>
+            <a:lvl3pPr marL="1143000" indent="-228600" algn="l" defTabSz="914400" rtl="0" eaLnBrk="1" latinLnBrk="0" hangingPunct="1">
+              <a:lnSpc>
+                <a:spcPct val="90000"/>
+              </a:lnSpc>
+              <a:spcBef>
+                <a:spcPts val="500"/>
+              </a:spcBef>
+              <a:buFont typeface="Arial" panose="020B0604020202020204" pitchFamily="34" charset="0"/>
+              <a:buChar char="•"/>
+              <a:defRPr sz="2000" kern="1200">
+                <a:solidFill>
+                  <a:schemeClr val="tx1"/>
+                </a:solidFill>
+                <a:latin typeface="+mn-lt"/>
+                <a:ea typeface="+mn-ea"/>
+                <a:cs typeface="+mn-cs"/>
+              </a:defRPr>
+            </a:lvl3pPr>
+            <a:lvl4pPr marL="1600200" indent="-228600" algn="l" defTabSz="914400" rtl="0" eaLnBrk="1" latinLnBrk="0" hangingPunct="1">
+              <a:lnSpc>
+                <a:spcPct val="90000"/>
+              </a:lnSpc>
+              <a:spcBef>
+                <a:spcPts val="500"/>
+              </a:spcBef>
+              <a:buFont typeface="Arial" panose="020B0604020202020204" pitchFamily="34" charset="0"/>
+              <a:buChar char="•"/>
+              <a:defRPr sz="1800" kern="1200">
+                <a:solidFill>
+                  <a:schemeClr val="tx1"/>
+                </a:solidFill>
+                <a:latin typeface="+mn-lt"/>
+                <a:ea typeface="+mn-ea"/>
+                <a:cs typeface="+mn-cs"/>
+              </a:defRPr>
+            </a:lvl4pPr>
+            <a:lvl5pPr marL="2057400" indent="-228600" algn="l" defTabSz="914400" rtl="0" eaLnBrk="1" latinLnBrk="0" hangingPunct="1">
+              <a:lnSpc>
+                <a:spcPct val="90000"/>
+              </a:lnSpc>
+              <a:spcBef>
+                <a:spcPts val="500"/>
+              </a:spcBef>
+              <a:buFont typeface="Arial" panose="020B0604020202020204" pitchFamily="34" charset="0"/>
+              <a:buChar char="•"/>
+              <a:defRPr sz="1800" kern="1200">
+                <a:solidFill>
+                  <a:schemeClr val="tx1"/>
+                </a:solidFill>
+                <a:latin typeface="+mn-lt"/>
+                <a:ea typeface="+mn-ea"/>
+                <a:cs typeface="+mn-cs"/>
+              </a:defRPr>
+            </a:lvl5pPr>
+            <a:lvl6pPr marL="2514600" indent="-228600" algn="l" defTabSz="914400" rtl="0" eaLnBrk="1" latinLnBrk="0" hangingPunct="1">
+              <a:lnSpc>
+                <a:spcPct val="90000"/>
+              </a:lnSpc>
+              <a:spcBef>
+                <a:spcPts val="500"/>
+              </a:spcBef>
+              <a:buFont typeface="Arial" panose="020B0604020202020204" pitchFamily="34" charset="0"/>
+              <a:buChar char="•"/>
+              <a:defRPr sz="1800" kern="1200">
+                <a:solidFill>
+                  <a:schemeClr val="tx1"/>
+                </a:solidFill>
+                <a:latin typeface="+mn-lt"/>
+                <a:ea typeface="+mn-ea"/>
+                <a:cs typeface="+mn-cs"/>
+              </a:defRPr>
+            </a:lvl6pPr>
+            <a:lvl7pPr marL="2971800" indent="-228600" algn="l" defTabSz="914400" rtl="0" eaLnBrk="1" latinLnBrk="0" hangingPunct="1">
+              <a:lnSpc>
+                <a:spcPct val="90000"/>
+              </a:lnSpc>
+              <a:spcBef>
+                <a:spcPts val="500"/>
+              </a:spcBef>
+              <a:buFont typeface="Arial" panose="020B0604020202020204" pitchFamily="34" charset="0"/>
+              <a:buChar char="•"/>
+              <a:defRPr sz="1800" kern="1200">
+                <a:solidFill>
+                  <a:schemeClr val="tx1"/>
+                </a:solidFill>
+                <a:latin typeface="+mn-lt"/>
+                <a:ea typeface="+mn-ea"/>
+                <a:cs typeface="+mn-cs"/>
+              </a:defRPr>
+            </a:lvl7pPr>
+            <a:lvl8pPr marL="3429000" indent="-228600" algn="l" defTabSz="914400" rtl="0" eaLnBrk="1" latinLnBrk="0" hangingPunct="1">
+              <a:lnSpc>
+                <a:spcPct val="90000"/>
+              </a:lnSpc>
+              <a:spcBef>
+                <a:spcPts val="500"/>
+              </a:spcBef>
+              <a:buFont typeface="Arial" panose="020B0604020202020204" pitchFamily="34" charset="0"/>
+              <a:buChar char="•"/>
+              <a:defRPr sz="1800" kern="1200">
+                <a:solidFill>
+                  <a:schemeClr val="tx1"/>
+                </a:solidFill>
+                <a:latin typeface="+mn-lt"/>
+                <a:ea typeface="+mn-ea"/>
+                <a:cs typeface="+mn-cs"/>
+              </a:defRPr>
+            </a:lvl8pPr>
+            <a:lvl9pPr marL="3886200" indent="-228600" algn="l" defTabSz="914400" rtl="0" eaLnBrk="1" latinLnBrk="0" hangingPunct="1">
+              <a:lnSpc>
+                <a:spcPct val="90000"/>
+              </a:lnSpc>
+              <a:spcBef>
+                <a:spcPts val="500"/>
+              </a:spcBef>
+              <a:buFont typeface="Arial" panose="020B0604020202020204" pitchFamily="34" charset="0"/>
+              <a:buChar char="•"/>
+              <a:defRPr sz="1800" kern="1200">
+                <a:solidFill>
+                  <a:schemeClr val="tx1"/>
+                </a:solidFill>
+                <a:latin typeface="+mn-lt"/>
+                <a:ea typeface="+mn-ea"/>
+                <a:cs typeface="+mn-cs"/>
+              </a:defRPr>
+            </a:lvl9pPr>
+          </a:lstStyle>
+          <a:p>
+            <a:pPr marL="0" indent="0">
+              <a:buNone/>
+            </a:pPr>
+            <a:r>
+              <a:rPr lang="ru-RU" sz="3200" dirty="0"/>
+              <a:t>Также использовался протокол </a:t>
+            </a:r>
+            <a:r>
+              <a:rPr lang="en-US" sz="3200" dirty="0"/>
+              <a:t>WebSocket</a:t>
+            </a:r>
+            <a:r>
+              <a:rPr lang="ru-RU" sz="3200" dirty="0"/>
+              <a:t> из-за высокой скорости</a:t>
             </a:r>
           </a:p>
         </p:txBody>
